--- a/public/fun/pack/pptx/birthdaypro/돌잔치프리미엄_44_감사인사중심_샴페인누아르.pptx
+++ b/public/fun/pack/pptx/birthdaypro/돌잔치프리미엄_44_감사인사중심_샴페인누아르.pptx
@@ -112,12 +112,12 @@
   <p:extLst>
     <p:ext uri="{521415D9-36F7-43E2-AB2F-B90AF26B5E84}">
       <p14:sectionLst xmlns:p14="http://schemas.microsoft.com/office/powerpoint/2010/main">
-        <p14:section name="시작" id="{EE2A38A8-CEA4-4999-8ADE-E43DA02F5AD8}">
+        <p14:section name="시작" id="{60D2A0F9-CF95-47A4-838D-07EF229559C5}">
           <p14:sldIdLst>
             <p14:sldId id="256"/>
           </p14:sldIdLst>
         </p14:section>
-        <p14:section name="본문" id="{4C18445C-EE7B-48CA-866B-E873707F179B}">
+        <p14:section name="본문" id="{BAE4F4E4-E90F-439E-AAA4-7CFDE44C2E20}">
           <p14:sldIdLst>
             <p14:sldId id="257"/>
             <p14:sldId id="258"/>
@@ -125,7 +125,7 @@
             <p14:sldId id="260"/>
           </p14:sldIdLst>
         </p14:section>
-        <p14:section name="마무리" id="{1C4066A7-20E2-4BE8-AEF7-A180B9A4C28D}">
+        <p14:section name="마무리" id="{A58995DD-8260-45B9-9F8D-19EAE5E33CE6}">
           <p14:sldIdLst>
             <p14:sldId id="261"/>
           </p14:sldIdLst>
@@ -1893,7 +1893,7 @@
             </a:lvl1pPr>
           </a:lstStyle>
           <a:p>
-            <a:fld id="{089C7BFE-8C88-4C9A-9500-12C2480FF3D6}" type="slidenum">
+            <a:fld id="{84AEA300-2C07-49C7-8EAB-1E54173AABB6}" type="slidenum">
               <a:rPr lang="en-US"/>
               <a:t>‹#›</a:t>
             </a:fld>
@@ -3071,7 +3071,7 @@
             </a:lvl1pPr>
           </a:lstStyle>
           <a:p>
-            <a:fld id="{5795CD49-8938-45F4-8532-528F13A0C9A4}" type="slidenum">
+            <a:fld id="{D439D93E-B1DE-4760-B639-BD25DB7A29F3}" type="slidenum">
               <a:rPr lang="en-US"/>
               <a:t>‹#›</a:t>
             </a:fld>
@@ -3824,7 +3824,7 @@
             </a:lvl1pPr>
           </a:lstStyle>
           <a:p>
-            <a:fld id="{6F0F87CC-B6C6-47CE-888F-E88CB5197D52}" type="slidenum">
+            <a:fld id="{EC217F52-7589-44B5-A574-1ED642E29D00}" type="slidenum">
               <a:rPr lang="en-US"/>
               <a:t>‹#›</a:t>
             </a:fld>
@@ -4801,7 +4801,7 @@
           <a:p>
             <a:r>
               <a:rPr lang="ko-KR"/>
-              <a:t>아기 이름 · 0000. 00. 00</a:t>
+              <a:t>아기 이름 · 날짜 입력</a:t>
             </a:r>
           </a:p>
           <a:p>
@@ -4961,7 +4961,7 @@
           <a:bodyPr/>
           <a:lstStyle/>
           <a:p>
-            <a:fld id="{22215633-18A2-4442-B6AD-1350956E3064}" type="slidenum">
+            <a:fld id="{D4C64F07-F236-4218-933B-1EA48B614DBF}" type="slidenum">
               <a:rPr lang="en-US"/>
               <a:t>‹#›</a:t>
             </a:fld>
@@ -5561,7 +5561,7 @@
           <a:bodyPr/>
           <a:lstStyle/>
           <a:p>
-            <a:fld id="{98999160-BA4D-4068-A703-1E1AF8CF14B7}" type="slidenum">
+            <a:fld id="{33E0BBA9-DBB2-496F-BC9B-84C9744E8CDA}" type="slidenum">
               <a:rPr lang="en-US"/>
               <a:t>‹#›</a:t>
             </a:fld>
@@ -5891,7 +5891,7 @@
           <a:bodyPr/>
           <a:lstStyle/>
           <a:p>
-            <a:fld id="{C6DD8313-3FE4-4C7E-B429-B7F0F67E8CE4}" type="slidenum">
+            <a:fld id="{AD545697-AAB7-429F-A18C-A59BEC40BB18}" type="slidenum">
               <a:rPr lang="en-US"/>
               <a:t>‹#›</a:t>
             </a:fld>
@@ -6741,7 +6741,7 @@
           <a:bodyPr/>
           <a:lstStyle/>
           <a:p>
-            <a:fld id="{90233B4A-ECB5-401F-A6B0-D5F4CEF2195C}" type="slidenum">
+            <a:fld id="{EC7A8B7B-AD2F-487B-83B9-194C04310786}" type="slidenum">
               <a:rPr lang="en-US"/>
               <a:t>‹#›</a:t>
             </a:fld>
